--- a/chapter2/parts/part-09-challenges-and-case-studies/clip.pptx
+++ b/chapter2/parts/part-09-challenges-and-case-studies/clip.pptx
@@ -4384,7 +4384,7 @@
               </a:defRPr>
             </a:pPr>
             <a:r>
-              <a:t>Chapter 2 — 09 Challenges And Case Studies</a:t>
+              <a:t>Chapter 2 — Challenges And Case Studies</a:t>
             </a:r>
           </a:p>
         </p:txBody>
@@ -4603,7 +4603,7 @@
               </a:defRPr>
             </a:pPr>
             <a:r>
-              <a:t>Chapter 2 — 09 Challenges And Case Studies</a:t>
+              <a:t>Chapter 2 — Challenges And Case Studies</a:t>
             </a:r>
           </a:p>
         </p:txBody>
@@ -4802,7 +4802,7 @@
               </a:defRPr>
             </a:pPr>
             <a:r>
-              <a:t>Chapter 2 — 09 Challenges And Case Studies</a:t>
+              <a:t>Chapter 2 — Challenges And Case Studies</a:t>
             </a:r>
           </a:p>
         </p:txBody>
@@ -4961,7 +4961,7 @@
               </a:defRPr>
             </a:pPr>
             <a:r>
-              <a:t>Chapter 2 — 09 Challenges And Case Studies</a:t>
+              <a:t>Chapter 2 — Challenges And Case Studies</a:t>
             </a:r>
           </a:p>
         </p:txBody>
@@ -5160,7 +5160,7 @@
               </a:defRPr>
             </a:pPr>
             <a:r>
-              <a:t>Chapter 2 — 09 Challenges And Case Studies</a:t>
+              <a:t>Chapter 2 — Challenges And Case Studies</a:t>
             </a:r>
           </a:p>
         </p:txBody>
@@ -5339,7 +5339,7 @@
               </a:defRPr>
             </a:pPr>
             <a:r>
-              <a:t>Chapter 2 — 09 Challenges And Case Studies</a:t>
+              <a:t>Chapter 2 — Challenges And Case Studies</a:t>
             </a:r>
           </a:p>
         </p:txBody>
@@ -5538,7 +5538,7 @@
               </a:defRPr>
             </a:pPr>
             <a:r>
-              <a:t>Chapter 2 — 09 Challenges And Case Studies</a:t>
+              <a:t>Chapter 2 — Challenges And Case Studies</a:t>
             </a:r>
           </a:p>
         </p:txBody>
@@ -5777,7 +5777,7 @@
               </a:defRPr>
             </a:pPr>
             <a:r>
-              <a:t>Chapter 2 — 09 Challenges And Case Studies</a:t>
+              <a:t>Chapter 2 — Challenges And Case Studies</a:t>
             </a:r>
           </a:p>
         </p:txBody>
@@ -5956,7 +5956,7 @@
               </a:defRPr>
             </a:pPr>
             <a:r>
-              <a:t>Chapter 2 — 09 Challenges And Case Studies</a:t>
+              <a:t>Chapter 2 — Challenges And Case Studies</a:t>
             </a:r>
           </a:p>
         </p:txBody>
@@ -6155,7 +6155,7 @@
               </a:defRPr>
             </a:pPr>
             <a:r>
-              <a:t>Chapter 2 — 09 Challenges And Case Studies</a:t>
+              <a:t>Chapter 2 — Challenges And Case Studies</a:t>
             </a:r>
           </a:p>
         </p:txBody>
@@ -6334,7 +6334,7 @@
               </a:defRPr>
             </a:pPr>
             <a:r>
-              <a:t>Chapter 2 — 09 Challenges And Case Studies</a:t>
+              <a:t>Chapter 2 — Challenges And Case Studies</a:t>
             </a:r>
           </a:p>
         </p:txBody>
@@ -6573,7 +6573,7 @@
               </a:defRPr>
             </a:pPr>
             <a:r>
-              <a:t>Chapter 2 — 09 Challenges And Case Studies</a:t>
+              <a:t>Chapter 2 — Challenges And Case Studies</a:t>
             </a:r>
           </a:p>
         </p:txBody>

--- a/chapter2/parts/part-09-challenges-and-case-studies/clip.pptx
+++ b/chapter2/parts/part-09-challenges-and-case-studies/clip.pptx
@@ -4468,10 +4468,12 @@
           </a:bodyPr>
           <a:lstStyle/>
           <a:p>
-            <a:pPr>
+            <a:pPr lvl="0" marL="457200" indent="-228600">
+              <a:buFont typeface="Calibri"/>
               <a:spcAft>
                 <a:spcPts val="1000"/>
               </a:spcAft>
+              <a:buSzPct val="100000"/>
               <a:buChar char="•"/>
               <a:lnSpc>
                 <a:spcPts val="2200"/>
@@ -4488,10 +4490,12 @@
             </a:r>
           </a:p>
           <a:p>
-            <a:pPr>
+            <a:pPr lvl="0" marL="457200" indent="-228600">
+              <a:buFont typeface="Calibri"/>
               <a:spcAft>
                 <a:spcPts val="1000"/>
               </a:spcAft>
+              <a:buSzPct val="100000"/>
               <a:buChar char="•"/>
               <a:lnSpc>
                 <a:spcPts val="2200"/>
@@ -4508,10 +4512,12 @@
             </a:r>
           </a:p>
           <a:p>
-            <a:pPr>
+            <a:pPr lvl="0" marL="457200" indent="-228600">
+              <a:buFont typeface="Calibri"/>
               <a:spcAft>
                 <a:spcPts val="1000"/>
               </a:spcAft>
+              <a:buSzPct val="100000"/>
               <a:buChar char="•"/>
               <a:lnSpc>
                 <a:spcPts val="2200"/>
@@ -4528,10 +4534,12 @@
             </a:r>
           </a:p>
           <a:p>
-            <a:pPr>
+            <a:pPr lvl="0" marL="457200" indent="-228600">
+              <a:buFont typeface="Calibri"/>
               <a:spcAft>
                 <a:spcPts val="1000"/>
               </a:spcAft>
+              <a:buSzPct val="100000"/>
               <a:buChar char="•"/>
               <a:lnSpc>
                 <a:spcPts val="2200"/>
@@ -4548,10 +4556,12 @@
             </a:r>
           </a:p>
           <a:p>
-            <a:pPr>
+            <a:pPr lvl="0" marL="457200" indent="-228600">
+              <a:buFont typeface="Calibri"/>
               <a:spcAft>
                 <a:spcPts val="1000"/>
               </a:spcAft>
+              <a:buSzPct val="100000"/>
               <a:buChar char="•"/>
               <a:lnSpc>
                 <a:spcPts val="2200"/>
@@ -4687,10 +4697,12 @@
           </a:bodyPr>
           <a:lstStyle/>
           <a:p>
-            <a:pPr>
+            <a:pPr lvl="0" marL="457200" indent="-228600">
+              <a:buFont typeface="Calibri"/>
               <a:spcAft>
                 <a:spcPts val="1000"/>
               </a:spcAft>
+              <a:buSzPct val="100000"/>
               <a:buChar char="•"/>
               <a:lnSpc>
                 <a:spcPts val="2200"/>
@@ -4707,10 +4719,12 @@
             </a:r>
           </a:p>
           <a:p>
-            <a:pPr>
+            <a:pPr lvl="0" marL="457200" indent="-228600">
+              <a:buFont typeface="Calibri"/>
               <a:spcAft>
                 <a:spcPts val="1000"/>
               </a:spcAft>
+              <a:buSzPct val="100000"/>
               <a:buChar char="•"/>
               <a:lnSpc>
                 <a:spcPts val="2200"/>
@@ -4727,10 +4741,12 @@
             </a:r>
           </a:p>
           <a:p>
-            <a:pPr>
+            <a:pPr lvl="0" marL="457200" indent="-228600">
+              <a:buFont typeface="Calibri"/>
               <a:spcAft>
                 <a:spcPts val="1000"/>
               </a:spcAft>
+              <a:buSzPct val="100000"/>
               <a:buChar char="•"/>
               <a:lnSpc>
                 <a:spcPts val="2200"/>
@@ -4747,10 +4763,12 @@
             </a:r>
           </a:p>
           <a:p>
-            <a:pPr>
+            <a:pPr lvl="0" marL="457200" indent="-228600">
+              <a:buFont typeface="Calibri"/>
               <a:spcAft>
                 <a:spcPts val="1000"/>
               </a:spcAft>
+              <a:buSzPct val="100000"/>
               <a:buChar char="•"/>
               <a:lnSpc>
                 <a:spcPts val="2200"/>
@@ -4886,10 +4904,12 @@
           </a:bodyPr>
           <a:lstStyle/>
           <a:p>
-            <a:pPr>
+            <a:pPr lvl="0" marL="457200" indent="-228600">
+              <a:buFont typeface="Calibri"/>
               <a:spcAft>
                 <a:spcPts val="1000"/>
               </a:spcAft>
+              <a:buSzPct val="100000"/>
               <a:buChar char="•"/>
               <a:lnSpc>
                 <a:spcPts val="2200"/>
@@ -4906,10 +4926,12 @@
             </a:r>
           </a:p>
           <a:p>
-            <a:pPr>
+            <a:pPr lvl="0" marL="457200" indent="-228600">
+              <a:buFont typeface="Calibri"/>
               <a:spcAft>
                 <a:spcPts val="1000"/>
               </a:spcAft>
+              <a:buSzPct val="100000"/>
               <a:buChar char="•"/>
               <a:lnSpc>
                 <a:spcPts val="2200"/>
@@ -5045,10 +5067,12 @@
           </a:bodyPr>
           <a:lstStyle/>
           <a:p>
-            <a:pPr>
+            <a:pPr lvl="0" marL="457200" indent="-228600">
+              <a:buFont typeface="Calibri"/>
               <a:spcAft>
                 <a:spcPts val="1000"/>
               </a:spcAft>
+              <a:buSzPct val="100000"/>
               <a:buChar char="•"/>
               <a:lnSpc>
                 <a:spcPts val="2200"/>
@@ -5065,10 +5089,12 @@
             </a:r>
           </a:p>
           <a:p>
-            <a:pPr>
+            <a:pPr lvl="0" marL="457200" indent="-228600">
+              <a:buFont typeface="Calibri"/>
               <a:spcAft>
                 <a:spcPts val="1000"/>
               </a:spcAft>
+              <a:buSzPct val="100000"/>
               <a:buChar char="•"/>
               <a:lnSpc>
                 <a:spcPts val="2200"/>
@@ -5085,10 +5111,12 @@
             </a:r>
           </a:p>
           <a:p>
-            <a:pPr>
+            <a:pPr lvl="0" marL="457200" indent="-228600">
+              <a:buFont typeface="Calibri"/>
               <a:spcAft>
                 <a:spcPts val="1000"/>
               </a:spcAft>
+              <a:buSzPct val="100000"/>
               <a:buChar char="•"/>
               <a:lnSpc>
                 <a:spcPts val="2200"/>
@@ -5105,10 +5133,12 @@
             </a:r>
           </a:p>
           <a:p>
-            <a:pPr>
+            <a:pPr lvl="0" marL="457200" indent="-228600">
+              <a:buFont typeface="Calibri"/>
               <a:spcAft>
                 <a:spcPts val="1000"/>
               </a:spcAft>
+              <a:buSzPct val="100000"/>
               <a:buChar char="•"/>
               <a:lnSpc>
                 <a:spcPts val="2200"/>
@@ -5244,10 +5274,12 @@
           </a:bodyPr>
           <a:lstStyle/>
           <a:p>
-            <a:pPr>
+            <a:pPr lvl="0" marL="457200" indent="-228600">
+              <a:buFont typeface="Calibri"/>
               <a:spcAft>
                 <a:spcPts val="1000"/>
               </a:spcAft>
+              <a:buSzPct val="100000"/>
               <a:buChar char="•"/>
               <a:lnSpc>
                 <a:spcPts val="2200"/>
@@ -5264,10 +5296,12 @@
             </a:r>
           </a:p>
           <a:p>
-            <a:pPr>
+            <a:pPr lvl="0" marL="457200" indent="-228600">
+              <a:buFont typeface="Calibri"/>
               <a:spcAft>
                 <a:spcPts val="1000"/>
               </a:spcAft>
+              <a:buSzPct val="100000"/>
               <a:buChar char="•"/>
               <a:lnSpc>
                 <a:spcPts val="2200"/>
@@ -5284,10 +5318,12 @@
             </a:r>
           </a:p>
           <a:p>
-            <a:pPr>
+            <a:pPr lvl="0" marL="457200" indent="-228600">
+              <a:buFont typeface="Calibri"/>
               <a:spcAft>
                 <a:spcPts val="1000"/>
               </a:spcAft>
+              <a:buSzPct val="100000"/>
               <a:buChar char="•"/>
               <a:lnSpc>
                 <a:spcPts val="2200"/>
@@ -5423,10 +5459,12 @@
           </a:bodyPr>
           <a:lstStyle/>
           <a:p>
-            <a:pPr>
+            <a:pPr lvl="0" marL="457200" indent="-228600">
+              <a:buFont typeface="Calibri"/>
               <a:spcAft>
                 <a:spcPts val="1000"/>
               </a:spcAft>
+              <a:buSzPct val="100000"/>
               <a:buChar char="•"/>
               <a:lnSpc>
                 <a:spcPts val="2200"/>
@@ -5443,10 +5481,12 @@
             </a:r>
           </a:p>
           <a:p>
-            <a:pPr>
+            <a:pPr lvl="0" marL="457200" indent="-228600">
+              <a:buFont typeface="Calibri"/>
               <a:spcAft>
                 <a:spcPts val="1000"/>
               </a:spcAft>
+              <a:buSzPct val="100000"/>
               <a:buChar char="•"/>
               <a:lnSpc>
                 <a:spcPts val="2200"/>
@@ -5463,10 +5503,12 @@
             </a:r>
           </a:p>
           <a:p>
-            <a:pPr>
+            <a:pPr lvl="0" marL="457200" indent="-228600">
+              <a:buFont typeface="Calibri"/>
               <a:spcAft>
                 <a:spcPts val="1000"/>
               </a:spcAft>
+              <a:buSzPct val="100000"/>
               <a:buChar char="•"/>
               <a:lnSpc>
                 <a:spcPts val="2200"/>
@@ -5483,10 +5525,12 @@
             </a:r>
           </a:p>
           <a:p>
-            <a:pPr>
+            <a:pPr lvl="0" marL="457200" indent="-228600">
+              <a:buFont typeface="Calibri"/>
               <a:spcAft>
                 <a:spcPts val="1000"/>
               </a:spcAft>
+              <a:buSzPct val="100000"/>
               <a:buChar char="•"/>
               <a:lnSpc>
                 <a:spcPts val="2200"/>
@@ -5622,10 +5666,12 @@
           </a:bodyPr>
           <a:lstStyle/>
           <a:p>
-            <a:pPr>
+            <a:pPr lvl="0" marL="457200" indent="-228600">
+              <a:buFont typeface="Calibri"/>
               <a:spcAft>
                 <a:spcPts val="1000"/>
               </a:spcAft>
+              <a:buSzPct val="100000"/>
               <a:buChar char="•"/>
               <a:lnSpc>
                 <a:spcPts val="2200"/>
@@ -5642,10 +5688,12 @@
             </a:r>
           </a:p>
           <a:p>
-            <a:pPr>
+            <a:pPr lvl="0" marL="457200" indent="-228600">
+              <a:buFont typeface="Calibri"/>
               <a:spcAft>
                 <a:spcPts val="1000"/>
               </a:spcAft>
+              <a:buSzPct val="100000"/>
               <a:buChar char="•"/>
               <a:lnSpc>
                 <a:spcPts val="2200"/>
@@ -5662,10 +5710,12 @@
             </a:r>
           </a:p>
           <a:p>
-            <a:pPr>
+            <a:pPr lvl="0" marL="457200" indent="-228600">
+              <a:buFont typeface="Calibri"/>
               <a:spcAft>
                 <a:spcPts val="1000"/>
               </a:spcAft>
+              <a:buSzPct val="100000"/>
               <a:buChar char="•"/>
               <a:lnSpc>
                 <a:spcPts val="2200"/>
@@ -5682,10 +5732,12 @@
             </a:r>
           </a:p>
           <a:p>
-            <a:pPr>
+            <a:pPr lvl="0" marL="457200" indent="-228600">
+              <a:buFont typeface="Calibri"/>
               <a:spcAft>
                 <a:spcPts val="1000"/>
               </a:spcAft>
+              <a:buSzPct val="100000"/>
               <a:buChar char="•"/>
               <a:lnSpc>
                 <a:spcPts val="2200"/>
@@ -5702,10 +5754,12 @@
             </a:r>
           </a:p>
           <a:p>
-            <a:pPr>
+            <a:pPr lvl="0" marL="457200" indent="-228600">
+              <a:buFont typeface="Calibri"/>
               <a:spcAft>
                 <a:spcPts val="1000"/>
               </a:spcAft>
+              <a:buSzPct val="100000"/>
               <a:buChar char="•"/>
               <a:lnSpc>
                 <a:spcPts val="2200"/>
@@ -5722,10 +5776,12 @@
             </a:r>
           </a:p>
           <a:p>
-            <a:pPr>
+            <a:pPr lvl="0" marL="457200" indent="-228600">
+              <a:buFont typeface="Calibri"/>
               <a:spcAft>
                 <a:spcPts val="1000"/>
               </a:spcAft>
+              <a:buSzPct val="100000"/>
               <a:buChar char="•"/>
               <a:lnSpc>
                 <a:spcPts val="2200"/>
@@ -5861,10 +5917,12 @@
           </a:bodyPr>
           <a:lstStyle/>
           <a:p>
-            <a:pPr>
+            <a:pPr lvl="0" marL="457200" indent="-228600">
+              <a:buFont typeface="Calibri"/>
               <a:spcAft>
                 <a:spcPts val="1000"/>
               </a:spcAft>
+              <a:buSzPct val="100000"/>
               <a:buChar char="•"/>
               <a:lnSpc>
                 <a:spcPts val="2200"/>
@@ -5881,10 +5939,12 @@
             </a:r>
           </a:p>
           <a:p>
-            <a:pPr>
+            <a:pPr lvl="0" marL="457200" indent="-228600">
+              <a:buFont typeface="Calibri"/>
               <a:spcAft>
                 <a:spcPts val="1000"/>
               </a:spcAft>
+              <a:buSzPct val="100000"/>
               <a:buChar char="•"/>
               <a:lnSpc>
                 <a:spcPts val="2200"/>
@@ -5901,10 +5961,12 @@
             </a:r>
           </a:p>
           <a:p>
-            <a:pPr>
+            <a:pPr lvl="0" marL="457200" indent="-228600">
+              <a:buFont typeface="Calibri"/>
               <a:spcAft>
                 <a:spcPts val="1000"/>
               </a:spcAft>
+              <a:buSzPct val="100000"/>
               <a:buChar char="•"/>
               <a:lnSpc>
                 <a:spcPts val="2200"/>
@@ -6040,10 +6102,12 @@
           </a:bodyPr>
           <a:lstStyle/>
           <a:p>
-            <a:pPr>
+            <a:pPr lvl="0" marL="457200" indent="-228600">
+              <a:buFont typeface="Calibri"/>
               <a:spcAft>
                 <a:spcPts val="1000"/>
               </a:spcAft>
+              <a:buSzPct val="100000"/>
               <a:buChar char="•"/>
               <a:lnSpc>
                 <a:spcPts val="2200"/>
@@ -6060,10 +6124,12 @@
             </a:r>
           </a:p>
           <a:p>
-            <a:pPr>
+            <a:pPr lvl="0" marL="457200" indent="-228600">
+              <a:buFont typeface="Calibri"/>
               <a:spcAft>
                 <a:spcPts val="1000"/>
               </a:spcAft>
+              <a:buSzPct val="100000"/>
               <a:buChar char="•"/>
               <a:lnSpc>
                 <a:spcPts val="2200"/>
@@ -6080,10 +6146,12 @@
             </a:r>
           </a:p>
           <a:p>
-            <a:pPr>
+            <a:pPr lvl="0" marL="457200" indent="-228600">
+              <a:buFont typeface="Calibri"/>
               <a:spcAft>
                 <a:spcPts val="1000"/>
               </a:spcAft>
+              <a:buSzPct val="100000"/>
               <a:buChar char="•"/>
               <a:lnSpc>
                 <a:spcPts val="2200"/>
@@ -6100,10 +6168,12 @@
             </a:r>
           </a:p>
           <a:p>
-            <a:pPr>
+            <a:pPr lvl="0" marL="457200" indent="-228600">
+              <a:buFont typeface="Calibri"/>
               <a:spcAft>
                 <a:spcPts val="1000"/>
               </a:spcAft>
+              <a:buSzPct val="100000"/>
               <a:buChar char="•"/>
               <a:lnSpc>
                 <a:spcPts val="2200"/>
@@ -6239,10 +6309,12 @@
           </a:bodyPr>
           <a:lstStyle/>
           <a:p>
-            <a:pPr>
+            <a:pPr lvl="0" marL="457200" indent="-228600">
+              <a:buFont typeface="Calibri"/>
               <a:spcAft>
                 <a:spcPts val="1000"/>
               </a:spcAft>
+              <a:buSzPct val="100000"/>
               <a:buChar char="•"/>
               <a:lnSpc>
                 <a:spcPts val="2200"/>
@@ -6259,10 +6331,12 @@
             </a:r>
           </a:p>
           <a:p>
-            <a:pPr>
+            <a:pPr lvl="0" marL="457200" indent="-228600">
+              <a:buFont typeface="Calibri"/>
               <a:spcAft>
                 <a:spcPts val="1000"/>
               </a:spcAft>
+              <a:buSzPct val="100000"/>
               <a:buChar char="•"/>
               <a:lnSpc>
                 <a:spcPts val="2200"/>
@@ -6279,10 +6353,12 @@
             </a:r>
           </a:p>
           <a:p>
-            <a:pPr>
+            <a:pPr lvl="0" marL="457200" indent="-228600">
+              <a:buFont typeface="Calibri"/>
               <a:spcAft>
                 <a:spcPts val="1000"/>
               </a:spcAft>
+              <a:buSzPct val="100000"/>
               <a:buChar char="•"/>
               <a:lnSpc>
                 <a:spcPts val="2200"/>
@@ -6418,10 +6494,12 @@
           </a:bodyPr>
           <a:lstStyle/>
           <a:p>
-            <a:pPr>
+            <a:pPr lvl="0" marL="457200" indent="-228600">
+              <a:buFont typeface="Calibri"/>
               <a:spcAft>
                 <a:spcPts val="1000"/>
               </a:spcAft>
+              <a:buSzPct val="100000"/>
               <a:buChar char="•"/>
               <a:lnSpc>
                 <a:spcPts val="2200"/>
@@ -6438,10 +6516,12 @@
             </a:r>
           </a:p>
           <a:p>
-            <a:pPr>
+            <a:pPr lvl="0" marL="457200" indent="-228600">
+              <a:buFont typeface="Calibri"/>
               <a:spcAft>
                 <a:spcPts val="1000"/>
               </a:spcAft>
+              <a:buSzPct val="100000"/>
               <a:buChar char="•"/>
               <a:lnSpc>
                 <a:spcPts val="2200"/>
@@ -6458,10 +6538,12 @@
             </a:r>
           </a:p>
           <a:p>
-            <a:pPr>
+            <a:pPr lvl="0" marL="457200" indent="-228600">
+              <a:buFont typeface="Calibri"/>
               <a:spcAft>
                 <a:spcPts val="1000"/>
               </a:spcAft>
+              <a:buSzPct val="100000"/>
               <a:buChar char="•"/>
               <a:lnSpc>
                 <a:spcPts val="2200"/>
@@ -6478,10 +6560,12 @@
             </a:r>
           </a:p>
           <a:p>
-            <a:pPr>
+            <a:pPr lvl="0" marL="457200" indent="-228600">
+              <a:buFont typeface="Calibri"/>
               <a:spcAft>
                 <a:spcPts val="1000"/>
               </a:spcAft>
+              <a:buSzPct val="100000"/>
               <a:buChar char="•"/>
               <a:lnSpc>
                 <a:spcPts val="2200"/>
@@ -6498,10 +6582,12 @@
             </a:r>
           </a:p>
           <a:p>
-            <a:pPr>
+            <a:pPr lvl="0" marL="457200" indent="-228600">
+              <a:buFont typeface="Calibri"/>
               <a:spcAft>
                 <a:spcPts val="1000"/>
               </a:spcAft>
+              <a:buSzPct val="100000"/>
               <a:buChar char="•"/>
               <a:lnSpc>
                 <a:spcPts val="2200"/>
@@ -6518,10 +6604,12 @@
             </a:r>
           </a:p>
           <a:p>
-            <a:pPr>
+            <a:pPr lvl="0" marL="457200" indent="-228600">
+              <a:buFont typeface="Calibri"/>
               <a:spcAft>
                 <a:spcPts val="1000"/>
               </a:spcAft>
+              <a:buSzPct val="100000"/>
               <a:buChar char="•"/>
               <a:lnSpc>
                 <a:spcPts val="2200"/>
